--- a/lecture_pptx/out/s20/ワーク02.pptx
+++ b/lecture_pptx/out/s20/ワーク02.pptx
@@ -2279,7 +2279,7 @@
         <p:spPr>
           <a:xfrm>
             <a:off x="365760" y="1188720"/>
-            <a:ext cx="1979676" cy="2468880"/>
+            <a:ext cx="1979676" cy="3017520"/>
           </a:xfrm>
           <a:prstGeom prst="roundRect">
             <a:avLst>
@@ -2386,8 +2386,8 @@
         </p:nvSpPr>
         <p:spPr>
           <a:xfrm>
-            <a:off x="530352" y="1901952"/>
-            <a:ext cx="1650492" cy="1645920"/>
+            <a:off x="530352" y="1938528"/>
+            <a:ext cx="1650492" cy="2148840"/>
           </a:xfrm>
           <a:prstGeom prst="rect">
             <a:avLst/>
@@ -2401,12 +2401,12 @@
           <a:p>
             <a:pPr indent="0" marL="0">
               <a:spcAft>
-                <a:spcPts val="200"/>
+                <a:spcPts val="600"/>
               </a:spcAft>
               <a:buNone/>
             </a:pPr>
             <a:r>
-              <a:rPr lang="en-US" sz="1300" dirty="0">
+              <a:rPr lang="en-US" sz="1600" dirty="0">
                 <a:solidFill>
                   <a:srgbClr val="1A1A1A"/>
                 </a:solidFill>
@@ -2416,7 +2416,7 @@
               </a:rPr>
               <a:t>複数のサービスを1つの処理で連動させる仕組み。</a:t>
             </a:r>
-            <a:endParaRPr lang="en-US" sz="1300" dirty="0"/>
+            <a:endParaRPr lang="en-US" sz="1600" dirty="0"/>
           </a:p>
         </p:txBody>
       </p:sp>
@@ -2429,7 +2429,7 @@
         <p:spPr>
           <a:xfrm>
             <a:off x="2510028" y="1188720"/>
-            <a:ext cx="1979676" cy="2468880"/>
+            <a:ext cx="1979676" cy="3017520"/>
           </a:xfrm>
           <a:prstGeom prst="roundRect">
             <a:avLst>
@@ -2536,8 +2536,8 @@
         </p:nvSpPr>
         <p:spPr>
           <a:xfrm>
-            <a:off x="2674620" y="1901952"/>
-            <a:ext cx="1650492" cy="1645920"/>
+            <a:off x="2674620" y="1938528"/>
+            <a:ext cx="1650492" cy="2148840"/>
           </a:xfrm>
           <a:prstGeom prst="rect">
             <a:avLst/>
@@ -2551,12 +2551,12 @@
           <a:p>
             <a:pPr indent="0" marL="0">
               <a:spcAft>
-                <a:spcPts val="200"/>
+                <a:spcPts val="600"/>
               </a:spcAft>
               <a:buNone/>
             </a:pPr>
             <a:r>
-              <a:rPr lang="en-US" sz="1300" dirty="0">
+              <a:rPr lang="en-US" sz="1600" dirty="0">
                 <a:solidFill>
                   <a:srgbClr val="1A1A1A"/>
                 </a:solidFill>
@@ -2566,7 +2566,7 @@
               </a:rPr>
               <a:t>エージェントが正常動作しているかを定期的に確認する。</a:t>
             </a:r>
-            <a:endParaRPr lang="en-US" sz="1300" dirty="0"/>
+            <a:endParaRPr lang="en-US" sz="1600" dirty="0"/>
           </a:p>
         </p:txBody>
       </p:sp>
@@ -2579,7 +2579,7 @@
         <p:spPr>
           <a:xfrm>
             <a:off x="4654296" y="1188720"/>
-            <a:ext cx="1979676" cy="2468880"/>
+            <a:ext cx="1979676" cy="3017520"/>
           </a:xfrm>
           <a:prstGeom prst="roundRect">
             <a:avLst>
@@ -2686,8 +2686,8 @@
         </p:nvSpPr>
         <p:spPr>
           <a:xfrm>
-            <a:off x="4818888" y="1901952"/>
-            <a:ext cx="1650492" cy="1645920"/>
+            <a:off x="4818888" y="1938528"/>
+            <a:ext cx="1650492" cy="2148840"/>
           </a:xfrm>
           <a:prstGeom prst="rect">
             <a:avLst/>
@@ -2701,12 +2701,12 @@
           <a:p>
             <a:pPr indent="0" marL="0">
               <a:spcAft>
-                <a:spcPts val="200"/>
+                <a:spcPts val="600"/>
               </a:spcAft>
               <a:buNone/>
             </a:pPr>
             <a:r>
-              <a:rPr lang="en-US" sz="1300" dirty="0">
+              <a:rPr lang="en-US" sz="1600" dirty="0">
                 <a:solidFill>
                   <a:srgbClr val="1A1A1A"/>
                 </a:solidFill>
@@ -2716,7 +2716,7 @@
               </a:rPr>
               <a:t>異常検知時に管理者に通知する仕組み。</a:t>
             </a:r>
-            <a:endParaRPr lang="en-US" sz="1300" dirty="0"/>
+            <a:endParaRPr lang="en-US" sz="1600" dirty="0"/>
           </a:p>
         </p:txBody>
       </p:sp>
@@ -2729,7 +2729,7 @@
         <p:spPr>
           <a:xfrm>
             <a:off x="6798564" y="1188720"/>
-            <a:ext cx="1979676" cy="2468880"/>
+            <a:ext cx="1979676" cy="3017520"/>
           </a:xfrm>
           <a:prstGeom prst="roundRect">
             <a:avLst>
@@ -2836,8 +2836,8 @@
         </p:nvSpPr>
         <p:spPr>
           <a:xfrm>
-            <a:off x="6963156" y="1901952"/>
-            <a:ext cx="1650492" cy="1645920"/>
+            <a:off x="6963156" y="1938528"/>
+            <a:ext cx="1650492" cy="2148840"/>
           </a:xfrm>
           <a:prstGeom prst="rect">
             <a:avLst/>
@@ -2851,12 +2851,12 @@
           <a:p>
             <a:pPr indent="0" marL="0">
               <a:spcAft>
-                <a:spcPts val="200"/>
+                <a:spcPts val="600"/>
               </a:spcAft>
               <a:buNone/>
             </a:pPr>
             <a:r>
-              <a:rPr lang="en-US" sz="1300" dirty="0">
+              <a:rPr lang="en-US" sz="1600" dirty="0">
                 <a:solidFill>
                   <a:srgbClr val="1A1A1A"/>
                 </a:solidFill>
@@ -2866,7 +2866,7 @@
               </a:rPr>
               <a:t>実業務でどう使うかを具体的に描いた計画書。</a:t>
             </a:r>
-            <a:endParaRPr lang="en-US" sz="1300" dirty="0"/>
+            <a:endParaRPr lang="en-US" sz="1600" dirty="0"/>
           </a:p>
         </p:txBody>
       </p:sp>
@@ -2878,8 +2878,8 @@
         </p:nvSpPr>
         <p:spPr>
           <a:xfrm>
-            <a:off x="365760" y="3931920"/>
-            <a:ext cx="8412480" cy="1188720"/>
+            <a:off x="365760" y="4389120"/>
+            <a:ext cx="8412480" cy="914400"/>
           </a:xfrm>
           <a:prstGeom prst="rect">
             <a:avLst/>
